--- a/data/09_internal_training/training_8.pptx
+++ b/data/09_internal_training/training_8.pptx
@@ -3140,29 +3140,12 @@
           <a:p/>
           <a:p>
             <a:r>
-              <a:t>根据内部财务模型测算，鸿睿思博信息有限公司 在未来三年</a:t>
-            </a:r>
-          </a:p>
-          <a:p>
-            <a:r>
-              <a:t>收入复合增长率预计可达到 27% 左右。</a:t>
-            </a:r>
-          </a:p>
-          <a:p>
-            <a:r>
-              <a:t>该预测基于行业需求增长以及公司产能扩张计划。</a:t>
-            </a:r>
-          </a:p>
-          <a:p/>
-          <a:p/>
-          <a:p>
-            <a:r>
-              <a:t>华辰资本旗下的 HC Energy Transition Fund 在最近的资产配置会议中</a:t>
-            </a:r>
-          </a:p>
-          <a:p>
-            <a:r>
-              <a:t>讨论了 医疗科技 行业的投资机会，并对 凌云网络有限公司</a:t>
+              <a:t>华辰资本旗下的 HC Global Macro Fund 在最近的资产配置会议中</a:t>
+            </a:r>
+          </a:p>
+          <a:p>
+            <a:r>
+              <a:t>讨论了 医疗科技 行业的投资机会，并对 迪摩信息有限公司</a:t>
             </a:r>
           </a:p>
           <a:p>
@@ -3174,17 +3157,34 @@
           <a:p/>
           <a:p>
             <a:r>
-              <a:t>风险管理部认为，新能源 行业仍然面临若干</a:t>
-            </a:r>
-          </a:p>
-          <a:p>
-            <a:r>
-              <a:t>不确定性因素，包括技术迭代风险、政策变化、</a:t>
-            </a:r>
-          </a:p>
-          <a:p>
-            <a:r>
-              <a:t>以及市场竞争加剧等问题。</a:t>
+              <a:t>从产业链角度看，消费科技 行业主要由上游设备厂商、</a:t>
+            </a:r>
+          </a:p>
+          <a:p>
+            <a:r>
+              <a:t>中游平台企业以及下游应用厂商组成。</a:t>
+            </a:r>
+          </a:p>
+          <a:p>
+            <a:r>
+              <a:t>华泰通安传媒有限公司 主要位于产业链的 上游 环节。</a:t>
+            </a:r>
+          </a:p>
+          <a:p/>
+          <a:p/>
+          <a:p>
+            <a:r>
+              <a:t>从产业链角度看，半导体 行业主要由上游设备厂商、</a:t>
+            </a:r>
+          </a:p>
+          <a:p>
+            <a:r>
+              <a:t>中游平台企业以及下游应用厂商组成。</a:t>
+            </a:r>
+          </a:p>
+          <a:p>
+            <a:r>
+              <a:t>精芯信息有限公司 主要位于产业链的 中游 环节。</a:t>
             </a:r>
           </a:p>
           <a:p/>
@@ -3246,51 +3246,61 @@
           <a:p/>
           <a:p>
             <a:r>
-              <a:t>风险管理部认为，医疗科技 行业仍然面临若干</a:t>
-            </a:r>
-          </a:p>
-          <a:p>
-            <a:r>
-              <a:t>不确定性因素，包括技术迭代风险、政策变化、</a:t>
-            </a:r>
-          </a:p>
-          <a:p>
-            <a:r>
-              <a:t>以及市场竞争加剧等问题。</a:t>
-            </a:r>
-          </a:p>
-          <a:p/>
-          <a:p/>
-          <a:p>
-            <a:r>
-              <a:t>华辰资本旗下的 HC Quant Arbitrage Fund 在最近的资产配置会议中</a:t>
-            </a:r>
-          </a:p>
-          <a:p>
-            <a:r>
-              <a:t>讨论了 医疗科技 行业的投资机会，并对 雨林木风计算机网络有限公司</a:t>
-            </a:r>
-          </a:p>
-          <a:p>
-            <a:r>
-              <a:t>进行了重点评估。</a:t>
-            </a:r>
-          </a:p>
-          <a:p/>
-          <a:p/>
-          <a:p>
-            <a:r>
-              <a:t>风险管理部认为，人工智能 行业仍然面临若干</a:t>
-            </a:r>
-          </a:p>
-          <a:p>
-            <a:r>
-              <a:t>不确定性因素，包括技术迭代风险、政策变化、</a:t>
-            </a:r>
-          </a:p>
-          <a:p>
-            <a:r>
-              <a:t>以及市场竞争加剧等问题。</a:t>
+              <a:t>创汇传媒有限公司 是中国 新能源 行业的重要企业之一。</a:t>
+            </a:r>
+          </a:p>
+          <a:p>
+            <a:r>
+              <a:t>根据华辰资本 风险管理部 的研究，该公司成立于 2017 年，</a:t>
+            </a:r>
+          </a:p>
+          <a:p>
+            <a:r>
+              <a:t>目前员工规模约 7084 人。公司近年来持续加大研发投入，</a:t>
+            </a:r>
+          </a:p>
+          <a:p>
+            <a:r>
+              <a:t>在核心技术方面形成了较强的竞争壁垒。</a:t>
+            </a:r>
+          </a:p>
+          <a:p/>
+          <a:p/>
+          <a:p>
+            <a:r>
+              <a:t>华成育卓传媒有限公司 是中国 人工智能 行业的重要企业之一。</a:t>
+            </a:r>
+          </a:p>
+          <a:p>
+            <a:r>
+              <a:t>根据华辰资本 投资委员会 的研究，该公司成立于 2006 年，</a:t>
+            </a:r>
+          </a:p>
+          <a:p>
+            <a:r>
+              <a:t>目前员工规模约 7579 人。公司近年来持续加大研发投入，</a:t>
+            </a:r>
+          </a:p>
+          <a:p>
+            <a:r>
+              <a:t>在核心技术方面形成了较强的竞争壁垒。</a:t>
+            </a:r>
+          </a:p>
+          <a:p/>
+          <a:p/>
+          <a:p>
+            <a:r>
+              <a:t>从产业链角度看，消费科技 行业主要由上游设备厂商、</a:t>
+            </a:r>
+          </a:p>
+          <a:p>
+            <a:r>
+              <a:t>中游平台企业以及下游应用厂商组成。</a:t>
+            </a:r>
+          </a:p>
+          <a:p>
+            <a:r>
+              <a:t>天开科技有限公司 主要位于产业链的 中游 环节。</a:t>
             </a:r>
           </a:p>
           <a:p/>
@@ -3352,51 +3362,56 @@
           <a:p/>
           <a:p>
             <a:r>
-              <a:t>从产业链角度看，医疗科技 行业主要由上游设备厂商、</a:t>
-            </a:r>
-          </a:p>
-          <a:p>
-            <a:r>
-              <a:t>中游平台企业以及下游应用厂商组成。</a:t>
-            </a:r>
-          </a:p>
-          <a:p>
-            <a:r>
-              <a:t>创联世纪科技有限公司 主要位于产业链的 下游 环节。</a:t>
-            </a:r>
-          </a:p>
-          <a:p/>
-          <a:p/>
-          <a:p>
-            <a:r>
-              <a:t>根据内部财务模型测算，精芯信息有限公司 在未来三年</a:t>
-            </a:r>
-          </a:p>
-          <a:p>
-            <a:r>
-              <a:t>收入复合增长率预计可达到 18% 左右。</a:t>
-            </a:r>
-          </a:p>
-          <a:p>
-            <a:r>
-              <a:t>该预测基于行业需求增长以及公司产能扩张计划。</a:t>
-            </a:r>
-          </a:p>
-          <a:p/>
-          <a:p/>
-          <a:p>
-            <a:r>
-              <a:t>华辰资本旗下的 HC Energy Transition Fund 在最近的资产配置会议中</a:t>
-            </a:r>
-          </a:p>
-          <a:p>
-            <a:r>
-              <a:t>讨论了 医疗科技 行业的投资机会，并对 创亿信息有限公司</a:t>
-            </a:r>
-          </a:p>
-          <a:p>
-            <a:r>
-              <a:t>进行了重点评估。</a:t>
+              <a:t>风险管理部认为，半导体 行业仍然面临若干</a:t>
+            </a:r>
+          </a:p>
+          <a:p>
+            <a:r>
+              <a:t>不确定性因素，包括技术迭代风险、政策变化、</a:t>
+            </a:r>
+          </a:p>
+          <a:p>
+            <a:r>
+              <a:t>以及市场竞争加剧等问题。</a:t>
+            </a:r>
+          </a:p>
+          <a:p/>
+          <a:p/>
+          <a:p>
+            <a:r>
+              <a:t>风险管理部认为，消费科技 行业仍然面临若干</a:t>
+            </a:r>
+          </a:p>
+          <a:p>
+            <a:r>
+              <a:t>不确定性因素，包括技术迭代风险、政策变化、</a:t>
+            </a:r>
+          </a:p>
+          <a:p>
+            <a:r>
+              <a:t>以及市场竞争加剧等问题。</a:t>
+            </a:r>
+          </a:p>
+          <a:p/>
+          <a:p/>
+          <a:p>
+            <a:r>
+              <a:t>方正科技传媒有限公司 是中国 人工智能 行业的重要企业之一。</a:t>
+            </a:r>
+          </a:p>
+          <a:p>
+            <a:r>
+              <a:t>根据华辰资本 投资委员会 的研究，该公司成立于 2019 年，</a:t>
+            </a:r>
+          </a:p>
+          <a:p>
+            <a:r>
+              <a:t>目前员工规模约 2043 人。公司近年来持续加大研发投入，</a:t>
+            </a:r>
+          </a:p>
+          <a:p>
+            <a:r>
+              <a:t>在核心技术方面形成了较强的竞争壁垒。</a:t>
             </a:r>
           </a:p>
           <a:p/>
@@ -3458,29 +3473,12 @@
           <a:p/>
           <a:p>
             <a:r>
-              <a:t>华辰资本旗下的 HC Energy Transition Fund 在最近的资产配置会议中</a:t>
-            </a:r>
-          </a:p>
-          <a:p>
-            <a:r>
-              <a:t>讨论了 医疗科技 行业的投资机会，并对 创亿信息有限公司</a:t>
-            </a:r>
-          </a:p>
-          <a:p>
-            <a:r>
-              <a:t>进行了重点评估。</a:t>
-            </a:r>
-          </a:p>
-          <a:p/>
-          <a:p/>
-          <a:p>
-            <a:r>
-              <a:t>根据内部财务模型测算，新宇龙信息传媒有限公司 在未来三年</a:t>
-            </a:r>
-          </a:p>
-          <a:p>
-            <a:r>
-              <a:t>收入复合增长率预计可达到 32% 左右。</a:t>
+              <a:t>根据内部财务模型测算，华泰通安传媒有限公司 在未来三年</a:t>
+            </a:r>
+          </a:p>
+          <a:p>
+            <a:r>
+              <a:t>收入复合增长率预计可达到 33% 左右。</a:t>
             </a:r>
           </a:p>
           <a:p>
@@ -3492,7 +3490,29 @@
           <a:p/>
           <a:p>
             <a:r>
-              <a:t>风险管理部认为，半导体 行业仍然面临若干</a:t>
+              <a:t>雨林木风计算机科技有限公司 是中国 半导体 行业的重要企业之一。</a:t>
+            </a:r>
+          </a:p>
+          <a:p>
+            <a:r>
+              <a:t>根据华辰资本 投资策略部 的研究，该公司成立于 2007 年，</a:t>
+            </a:r>
+          </a:p>
+          <a:p>
+            <a:r>
+              <a:t>目前员工规模约 7826 人。公司近年来持续加大研发投入，</a:t>
+            </a:r>
+          </a:p>
+          <a:p>
+            <a:r>
+              <a:t>在核心技术方面形成了较强的竞争壁垒。</a:t>
+            </a:r>
+          </a:p>
+          <a:p/>
+          <a:p/>
+          <a:p>
+            <a:r>
+              <a:t>风险管理部认为，消费科技 行业仍然面临若干</a:t>
             </a:r>
           </a:p>
           <a:p>
@@ -3564,7 +3584,29 @@
           <a:p/>
           <a:p>
             <a:r>
-              <a:t>风险管理部认为，消费科技 行业仍然面临若干</a:t>
+              <a:t>飞利信科技有限公司 是中国 人工智能 行业的重要企业之一。</a:t>
+            </a:r>
+          </a:p>
+          <a:p>
+            <a:r>
+              <a:t>根据华辰资本 投资策略部 的研究，该公司成立于 2018 年，</a:t>
+            </a:r>
+          </a:p>
+          <a:p>
+            <a:r>
+              <a:t>目前员工规模约 1801 人。公司近年来持续加大研发投入，</a:t>
+            </a:r>
+          </a:p>
+          <a:p>
+            <a:r>
+              <a:t>在核心技术方面形成了较强的竞争壁垒。</a:t>
+            </a:r>
+          </a:p>
+          <a:p/>
+          <a:p/>
+          <a:p>
+            <a:r>
+              <a:t>风险管理部认为，医疗科技 行业仍然面临若干</a:t>
             </a:r>
           </a:p>
           <a:p>
@@ -3581,34 +3623,17 @@
           <a:p/>
           <a:p>
             <a:r>
-              <a:t>根据内部财务模型测算，万迅电脑网络有限公司 在未来三年</a:t>
-            </a:r>
-          </a:p>
-          <a:p>
-            <a:r>
-              <a:t>收入复合增长率预计可达到 13% 左右。</a:t>
-            </a:r>
-          </a:p>
-          <a:p>
-            <a:r>
-              <a:t>该预测基于行业需求增长以及公司产能扩张计划。</a:t>
-            </a:r>
-          </a:p>
-          <a:p/>
-          <a:p/>
-          <a:p>
-            <a:r>
-              <a:t>从产业链角度看，消费科技 行业主要由上游设备厂商、</a:t>
-            </a:r>
-          </a:p>
-          <a:p>
-            <a:r>
-              <a:t>中游平台企业以及下游应用厂商组成。</a:t>
-            </a:r>
-          </a:p>
-          <a:p>
-            <a:r>
-              <a:t>银嘉信息有限公司 主要位于产业链的 中游 环节。</a:t>
+              <a:t>风险管理部认为，人工智能 行业仍然面临若干</a:t>
+            </a:r>
+          </a:p>
+          <a:p>
+            <a:r>
+              <a:t>不确定性因素，包括技术迭代风险、政策变化、</a:t>
+            </a:r>
+          </a:p>
+          <a:p>
+            <a:r>
+              <a:t>以及市场竞争加剧等问题。</a:t>
             </a:r>
           </a:p>
           <a:p/>
@@ -3670,61 +3695,51 @@
           <a:p/>
           <a:p>
             <a:r>
-              <a:t>精芯科技有限公司 是中国 云计算 行业的重要企业之一。</a:t>
-            </a:r>
-          </a:p>
-          <a:p>
-            <a:r>
-              <a:t>根据华辰资本 投资策略部 的研究，该公司成立于 2005 年，</a:t>
-            </a:r>
-          </a:p>
-          <a:p>
-            <a:r>
-              <a:t>目前员工规模约 3520 人。公司近年来持续加大研发投入，</a:t>
-            </a:r>
-          </a:p>
-          <a:p>
-            <a:r>
-              <a:t>在核心技术方面形成了较强的竞争壁垒。</a:t>
-            </a:r>
-          </a:p>
-          <a:p/>
-          <a:p/>
-          <a:p>
-            <a:r>
-              <a:t>精芯科技有限公司 是中国 云计算 行业的重要企业之一。</a:t>
-            </a:r>
-          </a:p>
-          <a:p>
-            <a:r>
-              <a:t>根据华辰资本 投资委员会 的研究，该公司成立于 2005 年，</a:t>
-            </a:r>
-          </a:p>
-          <a:p>
-            <a:r>
-              <a:t>目前员工规模约 3520 人。公司近年来持续加大研发投入，</a:t>
-            </a:r>
-          </a:p>
-          <a:p>
-            <a:r>
-              <a:t>在核心技术方面形成了较强的竞争壁垒。</a:t>
-            </a:r>
-          </a:p>
-          <a:p/>
-          <a:p/>
-          <a:p>
-            <a:r>
-              <a:t>风险管理部认为，人工智能 行业仍然面临若干</a:t>
-            </a:r>
-          </a:p>
-          <a:p>
-            <a:r>
-              <a:t>不确定性因素，包括技术迭代风险、政策变化、</a:t>
-            </a:r>
-          </a:p>
-          <a:p>
-            <a:r>
-              <a:t>以及市场竞争加剧等问题。</a:t>
+              <a:t>华辰资本旗下的 HC Alpha Growth Fund 在最近的资产配置会议中</a:t>
+            </a:r>
+          </a:p>
+          <a:p>
+            <a:r>
+              <a:t>讨论了 半导体 行业的投资机会，并对 华泰通安网络有限公司</a:t>
+            </a:r>
+          </a:p>
+          <a:p>
+            <a:r>
+              <a:t>进行了重点评估。</a:t>
+            </a:r>
+          </a:p>
+          <a:p/>
+          <a:p/>
+          <a:p>
+            <a:r>
+              <a:t>华辰资本旗下的 HC Energy Transition Fund 在最近的资产配置会议中</a:t>
+            </a:r>
+          </a:p>
+          <a:p>
+            <a:r>
+              <a:t>讨论了 半导体 行业的投资机会，并对 中建创业科技有限公司</a:t>
+            </a:r>
+          </a:p>
+          <a:p>
+            <a:r>
+              <a:t>进行了重点评估。</a:t>
+            </a:r>
+          </a:p>
+          <a:p/>
+          <a:p/>
+          <a:p>
+            <a:r>
+              <a:t>根据内部财务模型测算，通际名联网络有限公司 在未来三年</a:t>
+            </a:r>
+          </a:p>
+          <a:p>
+            <a:r>
+              <a:t>收入复合增长率预计可达到 17% 左右。</a:t>
+            </a:r>
+          </a:p>
+          <a:p>
+            <a:r>
+              <a:t>该预测基于行业需求增长以及公司产能扩张计划。</a:t>
             </a:r>
           </a:p>
           <a:p/>
@@ -3786,24 +3801,7 @@
           <a:p/>
           <a:p>
             <a:r>
-              <a:t>风险管理部认为，医疗科技 行业仍然面临若干</a:t>
-            </a:r>
-          </a:p>
-          <a:p>
-            <a:r>
-              <a:t>不确定性因素，包括技术迭代风险、政策变化、</a:t>
-            </a:r>
-          </a:p>
-          <a:p>
-            <a:r>
-              <a:t>以及市场竞争加剧等问题。</a:t>
-            </a:r>
-          </a:p>
-          <a:p/>
-          <a:p/>
-          <a:p>
-            <a:r>
-              <a:t>从产业链角度看，新能源 行业主要由上游设备厂商、</a:t>
+              <a:t>从产业链角度看，人工智能 行业主要由上游设备厂商、</a:t>
             </a:r>
           </a:p>
           <a:p>
@@ -3813,29 +3811,41 @@
           </a:p>
           <a:p>
             <a:r>
-              <a:t>九方网络有限公司 主要位于产业链的 中游 环节。</a:t>
-            </a:r>
-          </a:p>
-          <a:p/>
-          <a:p/>
-          <a:p>
-            <a:r>
-              <a:t>富罳信息有限公司 是中国 医疗科技 行业的重要企业之一。</a:t>
-            </a:r>
-          </a:p>
-          <a:p>
-            <a:r>
-              <a:t>根据华辰资本 风险管理部 的研究，该公司成立于 2018 年，</a:t>
-            </a:r>
-          </a:p>
-          <a:p>
-            <a:r>
-              <a:t>目前员工规模约 2035 人。公司近年来持续加大研发投入，</a:t>
-            </a:r>
-          </a:p>
-          <a:p>
-            <a:r>
-              <a:t>在核心技术方面形成了较强的竞争壁垒。</a:t>
+              <a:t>华成育卓传媒有限公司 主要位于产业链的 中游 环节。</a:t>
+            </a:r>
+          </a:p>
+          <a:p/>
+          <a:p/>
+          <a:p>
+            <a:r>
+              <a:t>华辰资本旗下的 HC Global Macro Fund 在最近的资产配置会议中</a:t>
+            </a:r>
+          </a:p>
+          <a:p>
+            <a:r>
+              <a:t>讨论了 消费科技 行业的投资机会，并对 鑫博腾飞信息有限公司</a:t>
+            </a:r>
+          </a:p>
+          <a:p>
+            <a:r>
+              <a:t>进行了重点评估。</a:t>
+            </a:r>
+          </a:p>
+          <a:p/>
+          <a:p/>
+          <a:p>
+            <a:r>
+              <a:t>根据内部财务模型测算，飞海科技传媒有限公司 在未来三年</a:t>
+            </a:r>
+          </a:p>
+          <a:p>
+            <a:r>
+              <a:t>收入复合增长率预计可达到 16% 左右。</a:t>
+            </a:r>
+          </a:p>
+          <a:p>
+            <a:r>
+              <a:t>该预测基于行业需求增长以及公司产能扩张计划。</a:t>
             </a:r>
           </a:p>
           <a:p/>
@@ -3897,51 +3907,56 @@
           <a:p/>
           <a:p>
             <a:r>
-              <a:t>风险管理部认为，新能源 行业仍然面临若干</a:t>
-            </a:r>
-          </a:p>
-          <a:p>
-            <a:r>
-              <a:t>不确定性因素，包括技术迭代风险、政策变化、</a:t>
-            </a:r>
-          </a:p>
-          <a:p>
-            <a:r>
-              <a:t>以及市场竞争加剧等问题。</a:t>
-            </a:r>
-          </a:p>
-          <a:p/>
-          <a:p/>
-          <a:p>
-            <a:r>
-              <a:t>从产业链角度看，机器人 行业主要由上游设备厂商、</a:t>
-            </a:r>
-          </a:p>
-          <a:p>
-            <a:r>
-              <a:t>中游平台企业以及下游应用厂商组成。</a:t>
-            </a:r>
-          </a:p>
-          <a:p>
-            <a:r>
-              <a:t>济南亿次元网络有限公司 主要位于产业链的 上游 环节。</a:t>
-            </a:r>
-          </a:p>
-          <a:p/>
-          <a:p/>
-          <a:p>
-            <a:r>
-              <a:t>风险管理部认为，医疗科技 行业仍然面临若干</a:t>
-            </a:r>
-          </a:p>
-          <a:p>
-            <a:r>
-              <a:t>不确定性因素，包括技术迭代风险、政策变化、</a:t>
-            </a:r>
-          </a:p>
-          <a:p>
-            <a:r>
-              <a:t>以及市场竞争加剧等问题。</a:t>
+              <a:t>根据内部财务模型测算，恩悌网络有限公司 在未来三年</a:t>
+            </a:r>
+          </a:p>
+          <a:p>
+            <a:r>
+              <a:t>收入复合增长率预计可达到 31% 左右。</a:t>
+            </a:r>
+          </a:p>
+          <a:p>
+            <a:r>
+              <a:t>该预测基于行业需求增长以及公司产能扩张计划。</a:t>
+            </a:r>
+          </a:p>
+          <a:p/>
+          <a:p/>
+          <a:p>
+            <a:r>
+              <a:t>根据内部财务模型测算，华泰通安传媒有限公司 在未来三年</a:t>
+            </a:r>
+          </a:p>
+          <a:p>
+            <a:r>
+              <a:t>收入复合增长率预计可达到 11% 左右。</a:t>
+            </a:r>
+          </a:p>
+          <a:p>
+            <a:r>
+              <a:t>该预测基于行业需求增长以及公司产能扩张计划。</a:t>
+            </a:r>
+          </a:p>
+          <a:p/>
+          <a:p/>
+          <a:p>
+            <a:r>
+              <a:t>华泰通安网络有限公司 是中国 半导体 行业的重要企业之一。</a:t>
+            </a:r>
+          </a:p>
+          <a:p>
+            <a:r>
+              <a:t>根据华辰资本 量化研究部 的研究，该公司成立于 2007 年，</a:t>
+            </a:r>
+          </a:p>
+          <a:p>
+            <a:r>
+              <a:t>目前员工规模约 3086 人。公司近年来持续加大研发投入，</a:t>
+            </a:r>
+          </a:p>
+          <a:p>
+            <a:r>
+              <a:t>在核心技术方面形成了较强的竞争壁垒。</a:t>
             </a:r>
           </a:p>
           <a:p/>
@@ -4003,40 +4018,6 @@
           <a:p/>
           <a:p>
             <a:r>
-              <a:t>华辰资本旗下的 HC Quant Arbitrage Fund 在最近的资产配置会议中</a:t>
-            </a:r>
-          </a:p>
-          <a:p>
-            <a:r>
-              <a:t>讨论了 云计算 行业的投资机会，并对 浦华众城信息有限公司</a:t>
-            </a:r>
-          </a:p>
-          <a:p>
-            <a:r>
-              <a:t>进行了重点评估。</a:t>
-            </a:r>
-          </a:p>
-          <a:p/>
-          <a:p/>
-          <a:p>
-            <a:r>
-              <a:t>风险管理部认为，半导体 行业仍然面临若干</a:t>
-            </a:r>
-          </a:p>
-          <a:p>
-            <a:r>
-              <a:t>不确定性因素，包括技术迭代风险、政策变化、</a:t>
-            </a:r>
-          </a:p>
-          <a:p>
-            <a:r>
-              <a:t>以及市场竞争加剧等问题。</a:t>
-            </a:r>
-          </a:p>
-          <a:p/>
-          <a:p/>
-          <a:p>
-            <a:r>
               <a:t>从产业链角度看，人工智能 行业主要由上游设备厂商、</a:t>
             </a:r>
           </a:p>
@@ -4047,7 +4028,41 @@
           </a:p>
           <a:p>
             <a:r>
-              <a:t>雨林木风计算机科技有限公司 主要位于产业链的 上游 环节。</a:t>
+              <a:t>通际名联科技有限公司 主要位于产业链的 下游 环节。</a:t>
+            </a:r>
+          </a:p>
+          <a:p/>
+          <a:p/>
+          <a:p>
+            <a:r>
+              <a:t>从产业链角度看，消费科技 行业主要由上游设备厂商、</a:t>
+            </a:r>
+          </a:p>
+          <a:p>
+            <a:r>
+              <a:t>中游平台企业以及下游应用厂商组成。</a:t>
+            </a:r>
+          </a:p>
+          <a:p>
+            <a:r>
+              <a:t>联软科技有限公司 主要位于产业链的 下游 环节。</a:t>
+            </a:r>
+          </a:p>
+          <a:p/>
+          <a:p/>
+          <a:p>
+            <a:r>
+              <a:t>从产业链角度看，消费科技 行业主要由上游设备厂商、</a:t>
+            </a:r>
+          </a:p>
+          <a:p>
+            <a:r>
+              <a:t>中游平台企业以及下游应用厂商组成。</a:t>
+            </a:r>
+          </a:p>
+          <a:p>
+            <a:r>
+              <a:t>联软科技有限公司 主要位于产业链的 中游 环节。</a:t>
             </a:r>
           </a:p>
           <a:p/>
@@ -4109,34 +4124,12 @@
           <a:p/>
           <a:p>
             <a:r>
-              <a:t>快讯网络有限公司 是中国 新能源 行业的重要企业之一。</a:t>
-            </a:r>
-          </a:p>
-          <a:p>
-            <a:r>
-              <a:t>根据华辰资本 风险管理部 的研究，该公司成立于 2016 年，</a:t>
-            </a:r>
-          </a:p>
-          <a:p>
-            <a:r>
-              <a:t>目前员工规模约 3433 人。公司近年来持续加大研发投入，</a:t>
-            </a:r>
-          </a:p>
-          <a:p>
-            <a:r>
-              <a:t>在核心技术方面形成了较强的竞争壁垒。</a:t>
-            </a:r>
-          </a:p>
-          <a:p/>
-          <a:p/>
-          <a:p>
-            <a:r>
-              <a:t>根据内部财务模型测算，精芯信息有限公司 在未来三年</a:t>
-            </a:r>
-          </a:p>
-          <a:p>
-            <a:r>
-              <a:t>收入复合增长率预计可达到 12% 左右。</a:t>
+              <a:t>根据内部财务模型测算，创联世纪信息有限公司 在未来三年</a:t>
+            </a:r>
+          </a:p>
+          <a:p>
+            <a:r>
+              <a:t>收入复合增长率预计可达到 17% 左右。</a:t>
             </a:r>
           </a:p>
           <a:p>
@@ -4148,22 +4141,34 @@
           <a:p/>
           <a:p>
             <a:r>
-              <a:t>精芯科技有限公司 是中国 云计算 行业的重要企业之一。</a:t>
-            </a:r>
-          </a:p>
-          <a:p>
-            <a:r>
-              <a:t>根据华辰资本 投资委员会 的研究，该公司成立于 2005 年，</a:t>
-            </a:r>
-          </a:p>
-          <a:p>
-            <a:r>
-              <a:t>目前员工规模约 3520 人。公司近年来持续加大研发投入，</a:t>
-            </a:r>
-          </a:p>
-          <a:p>
-            <a:r>
-              <a:t>在核心技术方面形成了较强的竞争壁垒。</a:t>
+              <a:t>从产业链角度看，人工智能 行业主要由上游设备厂商、</a:t>
+            </a:r>
+          </a:p>
+          <a:p>
+            <a:r>
+              <a:t>中游平台企业以及下游应用厂商组成。</a:t>
+            </a:r>
+          </a:p>
+          <a:p>
+            <a:r>
+              <a:t>飞利信科技有限公司 主要位于产业链的 下游 环节。</a:t>
+            </a:r>
+          </a:p>
+          <a:p/>
+          <a:p/>
+          <a:p>
+            <a:r>
+              <a:t>从产业链角度看，半导体 行业主要由上游设备厂商、</a:t>
+            </a:r>
+          </a:p>
+          <a:p>
+            <a:r>
+              <a:t>中游平台企业以及下游应用厂商组成。</a:t>
+            </a:r>
+          </a:p>
+          <a:p>
+            <a:r>
+              <a:t>精芯信息有限公司 主要位于产业链的 下游 环节。</a:t>
             </a:r>
           </a:p>
           <a:p/>
@@ -4225,56 +4230,51 @@
           <a:p/>
           <a:p>
             <a:r>
-              <a:t>华辰资本旗下的 HC Global Macro Fund 在最近的资产配置会议中</a:t>
-            </a:r>
-          </a:p>
-          <a:p>
-            <a:r>
-              <a:t>讨论了 人工智能 行业的投资机会，并对 迪摩科技有限公司</a:t>
+              <a:t>风险管理部认为，云计算 行业仍然面临若干</a:t>
+            </a:r>
+          </a:p>
+          <a:p>
+            <a:r>
+              <a:t>不确定性因素，包括技术迭代风险、政策变化、</a:t>
+            </a:r>
+          </a:p>
+          <a:p>
+            <a:r>
+              <a:t>以及市场竞争加剧等问题。</a:t>
+            </a:r>
+          </a:p>
+          <a:p/>
+          <a:p/>
+          <a:p>
+            <a:r>
+              <a:t>从产业链角度看，医疗科技 行业主要由上游设备厂商、</a:t>
+            </a:r>
+          </a:p>
+          <a:p>
+            <a:r>
+              <a:t>中游平台企业以及下游应用厂商组成。</a:t>
+            </a:r>
+          </a:p>
+          <a:p>
+            <a:r>
+              <a:t>华成育卓科技有限公司 主要位于产业链的 中游 环节。</a:t>
+            </a:r>
+          </a:p>
+          <a:p/>
+          <a:p/>
+          <a:p>
+            <a:r>
+              <a:t>华辰资本旗下的 HC Alpha Growth Fund 在最近的资产配置会议中</a:t>
+            </a:r>
+          </a:p>
+          <a:p>
+            <a:r>
+              <a:t>讨论了 机器人 行业的投资机会，并对 通际名联网络有限公司</a:t>
             </a:r>
           </a:p>
           <a:p>
             <a:r>
               <a:t>进行了重点评估。</a:t>
-            </a:r>
-          </a:p>
-          <a:p/>
-          <a:p/>
-          <a:p>
-            <a:r>
-              <a:t>创亿信息有限公司 是中国 医疗科技 行业的重要企业之一。</a:t>
-            </a:r>
-          </a:p>
-          <a:p>
-            <a:r>
-              <a:t>根据华辰资本 资产配置委员会 的研究，该公司成立于 2007 年，</a:t>
-            </a:r>
-          </a:p>
-          <a:p>
-            <a:r>
-              <a:t>目前员工规模约 7601 人。公司近年来持续加大研发投入，</a:t>
-            </a:r>
-          </a:p>
-          <a:p>
-            <a:r>
-              <a:t>在核心技术方面形成了较强的竞争壁垒。</a:t>
-            </a:r>
-          </a:p>
-          <a:p/>
-          <a:p/>
-          <a:p>
-            <a:r>
-              <a:t>从产业链角度看，新能源 行业主要由上游设备厂商、</a:t>
-            </a:r>
-          </a:p>
-          <a:p>
-            <a:r>
-              <a:t>中游平台企业以及下游应用厂商组成。</a:t>
-            </a:r>
-          </a:p>
-          <a:p>
-            <a:r>
-              <a:t>鸿睿思博网络有限公司 主要位于产业链的 下游 环节。</a:t>
             </a:r>
           </a:p>
           <a:p/>
@@ -4336,24 +4336,24 @@
           <a:p/>
           <a:p>
             <a:r>
-              <a:t>根据内部财务模型测算，富罳信息有限公司 在未来三年</a:t>
-            </a:r>
-          </a:p>
-          <a:p>
-            <a:r>
-              <a:t>收入复合增长率预计可达到 14% 左右。</a:t>
-            </a:r>
-          </a:p>
-          <a:p>
-            <a:r>
-              <a:t>该预测基于行业需求增长以及公司产能扩张计划。</a:t>
-            </a:r>
-          </a:p>
-          <a:p/>
-          <a:p/>
-          <a:p>
-            <a:r>
-              <a:t>从产业链角度看，人工智能 行业主要由上游设备厂商、</a:t>
+              <a:t>华辰资本旗下的 HC Quant Arbitrage Fund 在最近的资产配置会议中</a:t>
+            </a:r>
+          </a:p>
+          <a:p>
+            <a:r>
+              <a:t>讨论了 人工智能 行业的投资机会，并对 新格林耐特网络有限公司</a:t>
+            </a:r>
+          </a:p>
+          <a:p>
+            <a:r>
+              <a:t>进行了重点评估。</a:t>
+            </a:r>
+          </a:p>
+          <a:p/>
+          <a:p/>
+          <a:p>
+            <a:r>
+              <a:t>从产业链角度看，云计算 行业主要由上游设备厂商、</a:t>
             </a:r>
           </a:p>
           <a:p>
@@ -4363,24 +4363,29 @@
           </a:p>
           <a:p>
             <a:r>
-              <a:t>和泰科技有限公司 主要位于产业链的 上游 环节。</a:t>
-            </a:r>
-          </a:p>
-          <a:p/>
-          <a:p/>
-          <a:p>
-            <a:r>
-              <a:t>华辰资本旗下的 HC Quant Arbitrage Fund 在最近的资产配置会议中</a:t>
-            </a:r>
-          </a:p>
-          <a:p>
-            <a:r>
-              <a:t>讨论了 半导体 行业的投资机会，并对 华远软件信息有限公司</a:t>
-            </a:r>
-          </a:p>
-          <a:p>
-            <a:r>
-              <a:t>进行了重点评估。</a:t>
+              <a:t>良诺科技有限公司 主要位于产业链的 下游 环节。</a:t>
+            </a:r>
+          </a:p>
+          <a:p/>
+          <a:p/>
+          <a:p>
+            <a:r>
+              <a:t>毕博诚信息有限公司 是中国 机器人 行业的重要企业之一。</a:t>
+            </a:r>
+          </a:p>
+          <a:p>
+            <a:r>
+              <a:t>根据华辰资本 风险管理部 的研究，该公司成立于 2017 年，</a:t>
+            </a:r>
+          </a:p>
+          <a:p>
+            <a:r>
+              <a:t>目前员工规模约 508 人。公司近年来持续加大研发投入，</a:t>
+            </a:r>
+          </a:p>
+          <a:p>
+            <a:r>
+              <a:t>在核心技术方面形成了较强的竞争壁垒。</a:t>
             </a:r>
           </a:p>
           <a:p/>
@@ -4442,46 +4447,41 @@
           <a:p/>
           <a:p>
             <a:r>
-              <a:t>从产业链角度看，医疗科技 行业主要由上游设备厂商、</a:t>
-            </a:r>
-          </a:p>
-          <a:p>
-            <a:r>
-              <a:t>中游平台企业以及下游应用厂商组成。</a:t>
-            </a:r>
-          </a:p>
-          <a:p>
-            <a:r>
-              <a:t>凌云网络有限公司 主要位于产业链的 上游 环节。</a:t>
-            </a:r>
-          </a:p>
-          <a:p/>
-          <a:p/>
-          <a:p>
-            <a:r>
-              <a:t>华远软件信息有限公司 是中国 半导体 行业的重要企业之一。</a:t>
-            </a:r>
-          </a:p>
-          <a:p>
-            <a:r>
-              <a:t>根据华辰资本 资产配置委员会 的研究，该公司成立于 2015 年，</a:t>
-            </a:r>
-          </a:p>
-          <a:p>
-            <a:r>
-              <a:t>目前员工规模约 6302 人。公司近年来持续加大研发投入，</a:t>
-            </a:r>
-          </a:p>
-          <a:p>
-            <a:r>
-              <a:t>在核心技术方面形成了较强的竞争壁垒。</a:t>
-            </a:r>
-          </a:p>
-          <a:p/>
-          <a:p/>
-          <a:p>
-            <a:r>
-              <a:t>风险管理部认为，新能源 行业仍然面临若干</a:t>
+              <a:t>风险管理部认为，云计算 行业仍然面临若干</a:t>
+            </a:r>
+          </a:p>
+          <a:p>
+            <a:r>
+              <a:t>不确定性因素，包括技术迭代风险、政策变化、</a:t>
+            </a:r>
+          </a:p>
+          <a:p>
+            <a:r>
+              <a:t>以及市场竞争加剧等问题。</a:t>
+            </a:r>
+          </a:p>
+          <a:p/>
+          <a:p/>
+          <a:p>
+            <a:r>
+              <a:t>风险管理部认为，半导体 行业仍然面临若干</a:t>
+            </a:r>
+          </a:p>
+          <a:p>
+            <a:r>
+              <a:t>不确定性因素，包括技术迭代风险、政策变化、</a:t>
+            </a:r>
+          </a:p>
+          <a:p>
+            <a:r>
+              <a:t>以及市场竞争加剧等问题。</a:t>
+            </a:r>
+          </a:p>
+          <a:p/>
+          <a:p/>
+          <a:p>
+            <a:r>
+              <a:t>风险管理部认为，云计算 行业仍然面临若干</a:t>
             </a:r>
           </a:p>
           <a:p>
@@ -4553,7 +4553,29 @@
           <a:p/>
           <a:p>
             <a:r>
-              <a:t>从产业链角度看，医疗科技 行业主要由上游设备厂商、</a:t>
+              <a:t>信诚致远网络有限公司 是中国 半导体 行业的重要企业之一。</a:t>
+            </a:r>
+          </a:p>
+          <a:p>
+            <a:r>
+              <a:t>根据华辰资本 风险管理部 的研究，该公司成立于 2015 年，</a:t>
+            </a:r>
+          </a:p>
+          <a:p>
+            <a:r>
+              <a:t>目前员工规模约 2901 人。公司近年来持续加大研发投入，</a:t>
+            </a:r>
+          </a:p>
+          <a:p>
+            <a:r>
+              <a:t>在核心技术方面形成了较强的竞争壁垒。</a:t>
+            </a:r>
+          </a:p>
+          <a:p/>
+          <a:p/>
+          <a:p>
+            <a:r>
+              <a:t>从产业链角度看，云计算 行业主要由上游设备厂商、</a:t>
             </a:r>
           </a:p>
           <a:p>
@@ -4563,41 +4585,24 @@
           </a:p>
           <a:p>
             <a:r>
-              <a:t>创亿信息有限公司 主要位于产业链的 上游 环节。</a:t>
-            </a:r>
-          </a:p>
-          <a:p/>
-          <a:p/>
-          <a:p>
-            <a:r>
-              <a:t>从产业链角度看，机器人 行业主要由上游设备厂商、</a:t>
-            </a:r>
-          </a:p>
-          <a:p>
-            <a:r>
-              <a:t>中游平台企业以及下游应用厂商组成。</a:t>
-            </a:r>
-          </a:p>
-          <a:p>
-            <a:r>
-              <a:t>济南亿次元网络有限公司 主要位于产业链的 中游 环节。</a:t>
-            </a:r>
-          </a:p>
-          <a:p/>
-          <a:p/>
-          <a:p>
-            <a:r>
-              <a:t>华辰资本旗下的 HC Quant Arbitrage Fund 在最近的资产配置会议中</a:t>
-            </a:r>
-          </a:p>
-          <a:p>
-            <a:r>
-              <a:t>讨论了 消费科技 行业的投资机会，并对 南康网络有限公司</a:t>
-            </a:r>
-          </a:p>
-          <a:p>
-            <a:r>
-              <a:t>进行了重点评估。</a:t>
+              <a:t>佳禾传媒有限公司 主要位于产业链的 上游 环节。</a:t>
+            </a:r>
+          </a:p>
+          <a:p/>
+          <a:p/>
+          <a:p>
+            <a:r>
+              <a:t>根据内部财务模型测算，图龙信息传媒有限公司 在未来三年</a:t>
+            </a:r>
+          </a:p>
+          <a:p>
+            <a:r>
+              <a:t>收入复合增长率预计可达到 32% 左右。</a:t>
+            </a:r>
+          </a:p>
+          <a:p>
+            <a:r>
+              <a:t>该预测基于行业需求增长以及公司产能扩张计划。</a:t>
             </a:r>
           </a:p>
           <a:p/>
@@ -4659,17 +4664,39 @@
           <a:p/>
           <a:p>
             <a:r>
-              <a:t>根据内部财务模型测算，易动力科技有限公司 在未来三年</a:t>
-            </a:r>
-          </a:p>
-          <a:p>
-            <a:r>
-              <a:t>收入复合增长率预计可达到 22% 左右。</a:t>
-            </a:r>
-          </a:p>
-          <a:p>
-            <a:r>
-              <a:t>该预测基于行业需求增长以及公司产能扩张计划。</a:t>
+              <a:t>风险管理部认为，消费科技 行业仍然面临若干</a:t>
+            </a:r>
+          </a:p>
+          <a:p>
+            <a:r>
+              <a:t>不确定性因素，包括技术迭代风险、政策变化、</a:t>
+            </a:r>
+          </a:p>
+          <a:p>
+            <a:r>
+              <a:t>以及市场竞争加剧等问题。</a:t>
+            </a:r>
+          </a:p>
+          <a:p/>
+          <a:p/>
+          <a:p>
+            <a:r>
+              <a:t>信诚致远科技有限公司 是中国 云计算 行业的重要企业之一。</a:t>
+            </a:r>
+          </a:p>
+          <a:p>
+            <a:r>
+              <a:t>根据华辰资本 量化研究部 的研究，该公司成立于 2014 年，</a:t>
+            </a:r>
+          </a:p>
+          <a:p>
+            <a:r>
+              <a:t>目前员工规模约 1360 人。公司近年来持续加大研发投入，</a:t>
+            </a:r>
+          </a:p>
+          <a:p>
+            <a:r>
+              <a:t>在核心技术方面形成了较强的竞争壁垒。</a:t>
             </a:r>
           </a:p>
           <a:p/>
@@ -4681,29 +4708,12 @@
           </a:p>
           <a:p>
             <a:r>
-              <a:t>讨论了 消费科技 行业的投资机会，并对 兰金电子网络有限公司</a:t>
+              <a:t>讨论了 消费科技 行业的投资机会，并对 天开科技有限公司</a:t>
             </a:r>
           </a:p>
           <a:p>
             <a:r>
               <a:t>进行了重点评估。</a:t>
-            </a:r>
-          </a:p>
-          <a:p/>
-          <a:p/>
-          <a:p>
-            <a:r>
-              <a:t>根据内部财务模型测算，鸿睿思博网络有限公司 在未来三年</a:t>
-            </a:r>
-          </a:p>
-          <a:p>
-            <a:r>
-              <a:t>收入复合增长率预计可达到 22% 左右。</a:t>
-            </a:r>
-          </a:p>
-          <a:p>
-            <a:r>
-              <a:t>该预测基于行业需求增长以及公司产能扩张计划。</a:t>
             </a:r>
           </a:p>
           <a:p/>
